--- a/test-data/mc_fallback_pictures.pptx
+++ b/test-data/mc_fallback_pictures.pptx
@@ -3096,7 +3096,7 @@
         </p:nvSpPr>
         <p:spPr>
           <a:xfrm>
-            <a:off x="731520" y="365760"/>
+            <a:off x="731520" y="274320"/>
             <a:ext cx="3657600" cy="365760"/>
           </a:xfrm>
           <a:prstGeom prst="rect">
@@ -3134,7 +3134,7 @@
             </p:blipFill>
             <p:spPr>
               <a:xfrm>
-                <a:off x="731520" y="914400"/>
+                <a:off x="731520" y="640080"/>
                 <a:ext cx="762000" cy="457200"/>
               </a:xfrm>
               <a:prstGeom prst="rect">
@@ -3152,7 +3152,7 @@
         </p:nvSpPr>
         <p:spPr>
           <a:xfrm>
-            <a:off x="731520" y="2286000"/>
+            <a:off x="731520" y="1463040"/>
             <a:ext cx="3657600" cy="365760"/>
           </a:xfrm>
           <a:prstGeom prst="rect">
@@ -3168,6 +3168,105 @@
           <a:p>
             <a:r>
               <a:t>After the picture.</a:t>
+            </a:r>
+          </a:p>
+        </p:txBody>
+      </p:sp>
+      <p:sp>
+        <p:nvSpPr>
+          <p:cNvPr id="5" name="TextBox 4"/>
+          <p:cNvSpPr txBox="1"/>
+          <p:nvPr/>
+        </p:nvSpPr>
+        <p:spPr>
+          <a:xfrm>
+            <a:off x="731520" y="2194560"/>
+            <a:ext cx="3657600" cy="365760"/>
+          </a:xfrm>
+          <a:prstGeom prst="rect">
+            <a:avLst/>
+          </a:prstGeom>
+          <a:noFill/>
+        </p:spPr>
+        <p:txBody>
+          <a:bodyPr wrap="none">
+            <a:spAutoFit/>
+          </a:bodyPr>
+          <a:lstStyle/>
+          <a:p>
+            <a:r>
+              <a:t>Before the group picture.</a:t>
+            </a:r>
+          </a:p>
+        </p:txBody>
+      </p:sp>
+      <p:grpSp>
+        <p:nvGrpSpPr>
+          <p:cNvPr id="100" name="Picture group"/>
+          <p:cNvGrpSpPr/>
+          <p:nvPr/>
+        </p:nvGrpSpPr>
+        <p:grpSpPr>
+          <a:xfrm>
+            <a:off x="731520" y="2560320"/>
+            <a:ext cx="762000" cy="457200"/>
+            <a:chOff x="731520" y="2560320"/>
+            <a:chExt cx="762000" cy="457200"/>
+          </a:xfrm>
+        </p:grpSpPr>
+        <mc:AlternateContent>
+          <mc:Fallback>
+            <p:pic>
+              <p:nvPicPr>
+                <p:cNvPr id="6" name="Picture 5" descr=".mc-fallback-orange.png"/>
+                <p:cNvPicPr>
+                  <a:picLocks noChangeAspect="1"/>
+                </p:cNvPicPr>
+                <p:nvPr/>
+              </p:nvPicPr>
+              <p:blipFill>
+                <a:blip r:embed="rId2"/>
+                <a:stretch>
+                  <a:fillRect/>
+                </a:stretch>
+              </p:blipFill>
+              <p:spPr>
+                <a:xfrm>
+                  <a:off x="731520" y="2560320"/>
+                  <a:ext cx="762000" cy="457200"/>
+                </a:xfrm>
+                <a:prstGeom prst="rect">
+                  <a:avLst/>
+                </a:prstGeom>
+              </p:spPr>
+            </p:pic>
+          </mc:Fallback>
+        </mc:AlternateContent>
+      </p:grpSp>
+      <p:sp>
+        <p:nvSpPr>
+          <p:cNvPr id="101" name="TextBox 100"/>
+          <p:cNvSpPr txBox="1"/>
+          <p:nvPr/>
+        </p:nvSpPr>
+        <p:spPr>
+          <a:xfrm>
+            <a:off x="731520" y="4023360"/>
+            <a:ext cx="3657600" cy="365760"/>
+          </a:xfrm>
+          <a:prstGeom prst="rect">
+            <a:avLst/>
+          </a:prstGeom>
+          <a:noFill/>
+        </p:spPr>
+        <p:txBody>
+          <a:bodyPr wrap="none">
+            <a:spAutoFit/>
+          </a:bodyPr>
+          <a:lstStyle/>
+          <a:p>
+            <a:r>
+              <a:t>After the group picture.</a:t>
             </a:r>
           </a:p>
         </p:txBody>
